--- a/Rooker_GettingStarted/Presentations/6_25.pptx
+++ b/Rooker_GettingStarted/Presentations/6_25.pptx
@@ -126,6 +126,11 @@
       </a:defRPr>
     </a:lvl9pPr>
   </p:defaultTextStyle>
+  <p:extLst>
+    <p:ext uri="{EFAFB233-063F-42B5-8137-9DF3F51BA10A}">
+      <p15:sldGuideLst xmlns:p15="http://schemas.microsoft.com/office/powerpoint/2012/main"/>
+    </p:ext>
+  </p:extLst>
 </p:presentation>
 </file>
 
@@ -3447,7 +3452,7 @@
           <a:lstStyle/>
           <a:p>
             <a:r>
-              <a:rPr lang="en-US" dirty="0"/>
+              <a:rPr lang="en-US"/>
               <a:t>6/25/2026</a:t>
             </a:r>
           </a:p>
@@ -3759,14 +3764,14 @@
           <a:p>
             <a:pPr algn="ctr"/>
             <a:r>
-              <a:rPr lang="en-US" sz="4800" dirty="0"/>
+              <a:rPr lang="en-US" sz="4800"/>
               <a:t>M3</a:t>
             </a:r>
           </a:p>
           <a:p>
             <a:pPr algn="ctr"/>
             <a:r>
-              <a:rPr lang="en-US" sz="4800" dirty="0"/>
+              <a:rPr lang="en-US" sz="4800"/>
               <a:t>Velocity EOFs</a:t>
             </a:r>
           </a:p>
@@ -4072,14 +4077,14 @@
           <a:p>
             <a:pPr algn="ctr"/>
             <a:r>
-              <a:rPr lang="en-US" sz="4800" dirty="0"/>
+              <a:rPr lang="en-US" sz="4800"/>
               <a:t>M2</a:t>
             </a:r>
           </a:p>
           <a:p>
             <a:pPr algn="ctr"/>
             <a:r>
-              <a:rPr lang="en-US" sz="4800" dirty="0"/>
+              <a:rPr lang="en-US" sz="4800"/>
               <a:t>Velocity EOFs</a:t>
             </a:r>
           </a:p>
@@ -4145,7 +4150,7 @@
           <a:p>
             <a:pPr algn="ctr"/>
             <a:r>
-              <a:rPr lang="en-US" sz="4800" dirty="0"/>
+              <a:rPr lang="en-US" sz="4800"/>
               <a:t>Temperature EOFs</a:t>
             </a:r>
           </a:p>
@@ -4847,14 +4852,14 @@
           <a:p>
             <a:pPr algn="ctr"/>
             <a:r>
-              <a:rPr lang="en-US" sz="4800" dirty="0"/>
+              <a:rPr lang="en-US" sz="4800"/>
               <a:t>M1</a:t>
             </a:r>
           </a:p>
           <a:p>
             <a:pPr algn="ctr"/>
             <a:r>
-              <a:rPr lang="en-US" sz="4800" dirty="0"/>
+              <a:rPr lang="en-US" sz="4800"/>
               <a:t>Velocity EOFs</a:t>
             </a:r>
           </a:p>
@@ -5186,10 +5191,4 @@
     </a:ext>
   </a:extLst>
 </a:theme>
-</file>
-
-<file path=docMetadata/LabelInfo.xml><?xml version="1.0" encoding="utf-8"?>
-<clbl:labelList xmlns:clbl="http://schemas.microsoft.com/office/2020/mipLabelMetadata">
-  <clbl:label id="{22136781-9753-4c75-af28-68a078871ebf}" enabled="0" method="" siteId="{22136781-9753-4c75-af28-68a078871ebf}" removed="1"/>
-</clbl:labelList>
 </file>